--- a/esitys.pptx
+++ b/esitys.pptx
@@ -104,6 +104,11 @@
       </a:defRPr>
     </a:lvl9pPr>
   </p:defaultTextStyle>
+  <p:extLst>
+    <p:ext uri="{EFAFB233-063F-42B5-8137-9DF3F51BA10A}">
+      <p15:sldGuideLst xmlns:p15="http://schemas.microsoft.com/office/powerpoint/2012/main"/>
+    </p:ext>
+  </p:extLst>
 </p:presentation>
 </file>
 
@@ -3342,7 +3347,18 @@
           <a:bodyPr/>
           <a:lstStyle/>
           <a:p>
-            <a:endParaRPr lang="fi-FI"/>
+            <a:r>
+              <a:rPr lang="fi-FI" dirty="0" err="1"/>
+              <a:t>First</a:t>
+            </a:r>
+            <a:r>
+              <a:rPr lang="fi-FI" dirty="0"/>
+              <a:t> </a:t>
+            </a:r>
+            <a:r>
+              <a:rPr lang="fi-FI"/>
+              <a:t>slide</a:t>
+            </a:r>
           </a:p>
         </p:txBody>
       </p:sp>

--- a/esitys.pptx
+++ b/esitys.pptx
@@ -6,6 +6,9 @@
   </p:sldMasterIdLst>
   <p:sldIdLst>
     <p:sldId id="256" r:id="rId2"/>
+    <p:sldId id="257" r:id="rId3"/>
+    <p:sldId id="258" r:id="rId4"/>
+    <p:sldId id="259" r:id="rId5"/>
   </p:sldIdLst>
   <p:sldSz cx="12192000" cy="6858000"/>
   <p:notesSz cx="6858000" cy="9144000"/>
@@ -3348,42 +3351,45 @@
           <a:lstStyle/>
           <a:p>
             <a:r>
+              <a:rPr lang="fi-FI" dirty="0"/>
+              <a:t>Tavoite</a:t>
+            </a:r>
+          </a:p>
+        </p:txBody>
+      </p:sp>
+      <p:sp>
+        <p:nvSpPr>
+          <p:cNvPr id="3" name="Alaotsikko 2">
+            <a:extLst>
+              <a:ext uri="{FF2B5EF4-FFF2-40B4-BE49-F238E27FC236}">
+                <a16:creationId xmlns:a16="http://schemas.microsoft.com/office/drawing/2014/main" id="{9D934FDA-D8C4-A19C-BA3F-032A03495EB2}"/>
+              </a:ext>
+            </a:extLst>
+          </p:cNvPr>
+          <p:cNvSpPr>
+            <a:spLocks noGrp="1"/>
+          </p:cNvSpPr>
+          <p:nvPr>
+            <p:ph type="subTitle" idx="1"/>
+          </p:nvPr>
+        </p:nvSpPr>
+        <p:spPr/>
+        <p:txBody>
+          <a:bodyPr/>
+          <a:lstStyle/>
+          <a:p>
+            <a:r>
+              <a:rPr lang="fi-FI" dirty="0"/>
+              <a:t>Ennustaa koetuloksia ja tunnistaa millä </a:t>
+            </a:r>
+            <a:r>
               <a:rPr lang="fi-FI" dirty="0" err="1"/>
-              <a:t>First</a:t>
+              <a:t>tekijöilllä</a:t>
             </a:r>
             <a:r>
               <a:rPr lang="fi-FI" dirty="0"/>
-              <a:t> </a:t>
-            </a:r>
-            <a:r>
-              <a:rPr lang="fi-FI"/>
-              <a:t>slide</a:t>
-            </a:r>
-          </a:p>
-        </p:txBody>
-      </p:sp>
-      <p:sp>
-        <p:nvSpPr>
-          <p:cNvPr id="3" name="Alaotsikko 2">
-            <a:extLst>
-              <a:ext uri="{FF2B5EF4-FFF2-40B4-BE49-F238E27FC236}">
-                <a16:creationId xmlns:a16="http://schemas.microsoft.com/office/drawing/2014/main" id="{9D934FDA-D8C4-A19C-BA3F-032A03495EB2}"/>
-              </a:ext>
-            </a:extLst>
-          </p:cNvPr>
-          <p:cNvSpPr>
-            <a:spLocks noGrp="1"/>
-          </p:cNvSpPr>
-          <p:nvPr>
-            <p:ph type="subTitle" idx="1"/>
-          </p:nvPr>
-        </p:nvSpPr>
-        <p:spPr/>
-        <p:txBody>
-          <a:bodyPr/>
-          <a:lstStyle/>
-          <a:p>
-            <a:endParaRPr lang="fi-FI"/>
+              <a:t> on suurin vaikutus.</a:t>
+            </a:r>
           </a:p>
         </p:txBody>
       </p:sp>
@@ -3391,6 +3397,310 @@
     <p:extLst>
       <p:ext uri="{BB962C8B-B14F-4D97-AF65-F5344CB8AC3E}">
         <p14:creationId xmlns:p14="http://schemas.microsoft.com/office/powerpoint/2010/main" val="1582695251"/>
+      </p:ext>
+    </p:extLst>
+  </p:cSld>
+  <p:clrMapOvr>
+    <a:masterClrMapping/>
+  </p:clrMapOvr>
+</p:sld>
+</file>
+
+<file path=ppt/slides/slide2.xml><?xml version="1.0" encoding="utf-8"?>
+<p:sld xmlns:a="http://schemas.openxmlformats.org/drawingml/2006/main" xmlns:r="http://schemas.openxmlformats.org/officeDocument/2006/relationships" xmlns:p="http://schemas.openxmlformats.org/presentationml/2006/main">
+  <p:cSld>
+    <p:spTree>
+      <p:nvGrpSpPr>
+        <p:cNvPr id="1" name=""/>
+        <p:cNvGrpSpPr/>
+        <p:nvPr/>
+      </p:nvGrpSpPr>
+      <p:grpSpPr>
+        <a:xfrm>
+          <a:off x="0" y="0"/>
+          <a:ext cx="0" cy="0"/>
+          <a:chOff x="0" y="0"/>
+          <a:chExt cx="0" cy="0"/>
+        </a:xfrm>
+      </p:grpSpPr>
+      <p:sp>
+        <p:nvSpPr>
+          <p:cNvPr id="2" name="Otsikko 1">
+            <a:extLst>
+              <a:ext uri="{FF2B5EF4-FFF2-40B4-BE49-F238E27FC236}">
+                <a16:creationId xmlns:a16="http://schemas.microsoft.com/office/drawing/2014/main" id="{700E4F13-0FB6-C659-5A45-D84B090B51F8}"/>
+              </a:ext>
+            </a:extLst>
+          </p:cNvPr>
+          <p:cNvSpPr>
+            <a:spLocks noGrp="1"/>
+          </p:cNvSpPr>
+          <p:nvPr>
+            <p:ph type="title"/>
+          </p:nvPr>
+        </p:nvSpPr>
+        <p:spPr/>
+        <p:txBody>
+          <a:bodyPr/>
+          <a:lstStyle/>
+          <a:p>
+            <a:r>
+              <a:rPr lang="fi-FI" dirty="0"/>
+              <a:t>Datan esittely</a:t>
+            </a:r>
+          </a:p>
+        </p:txBody>
+      </p:sp>
+      <p:sp>
+        <p:nvSpPr>
+          <p:cNvPr id="3" name="Sisällön paikkamerkki 2">
+            <a:extLst>
+              <a:ext uri="{FF2B5EF4-FFF2-40B4-BE49-F238E27FC236}">
+                <a16:creationId xmlns:a16="http://schemas.microsoft.com/office/drawing/2014/main" id="{C04673C7-F578-2ECA-98EF-6133E9A7BE3A}"/>
+              </a:ext>
+            </a:extLst>
+          </p:cNvPr>
+          <p:cNvSpPr>
+            <a:spLocks noGrp="1"/>
+          </p:cNvSpPr>
+          <p:nvPr>
+            <p:ph idx="1"/>
+          </p:nvPr>
+        </p:nvSpPr>
+        <p:spPr/>
+        <p:txBody>
+          <a:bodyPr/>
+          <a:lstStyle/>
+          <a:p>
+            <a:r>
+              <a:rPr lang="fi-FI" dirty="0"/>
+              <a:t>Muuttujien kuvailu</a:t>
+            </a:r>
+          </a:p>
+          <a:p>
+            <a:r>
+              <a:rPr lang="fi-FI" dirty="0"/>
+              <a:t>Puuttuvat arvot</a:t>
+            </a:r>
+          </a:p>
+          <a:p>
+            <a:r>
+              <a:rPr lang="fi-FI" dirty="0"/>
+              <a:t>Kuvia</a:t>
+            </a:r>
+          </a:p>
+          <a:p>
+            <a:endParaRPr lang="fi-FI" dirty="0"/>
+          </a:p>
+        </p:txBody>
+      </p:sp>
+    </p:spTree>
+    <p:extLst>
+      <p:ext uri="{BB962C8B-B14F-4D97-AF65-F5344CB8AC3E}">
+        <p14:creationId xmlns:p14="http://schemas.microsoft.com/office/powerpoint/2010/main" val="1263036950"/>
+      </p:ext>
+    </p:extLst>
+  </p:cSld>
+  <p:clrMapOvr>
+    <a:masterClrMapping/>
+  </p:clrMapOvr>
+</p:sld>
+</file>
+
+<file path=ppt/slides/slide3.xml><?xml version="1.0" encoding="utf-8"?>
+<p:sld xmlns:a="http://schemas.openxmlformats.org/drawingml/2006/main" xmlns:r="http://schemas.openxmlformats.org/officeDocument/2006/relationships" xmlns:p="http://schemas.openxmlformats.org/presentationml/2006/main">
+  <p:cSld>
+    <p:spTree>
+      <p:nvGrpSpPr>
+        <p:cNvPr id="1" name=""/>
+        <p:cNvGrpSpPr/>
+        <p:nvPr/>
+      </p:nvGrpSpPr>
+      <p:grpSpPr>
+        <a:xfrm>
+          <a:off x="0" y="0"/>
+          <a:ext cx="0" cy="0"/>
+          <a:chOff x="0" y="0"/>
+          <a:chExt cx="0" cy="0"/>
+        </a:xfrm>
+      </p:grpSpPr>
+      <p:sp>
+        <p:nvSpPr>
+          <p:cNvPr id="2" name="Otsikko 1">
+            <a:extLst>
+              <a:ext uri="{FF2B5EF4-FFF2-40B4-BE49-F238E27FC236}">
+                <a16:creationId xmlns:a16="http://schemas.microsoft.com/office/drawing/2014/main" id="{E9AE275C-BA1D-A8BA-D769-A7828155F95E}"/>
+              </a:ext>
+            </a:extLst>
+          </p:cNvPr>
+          <p:cNvSpPr>
+            <a:spLocks noGrp="1"/>
+          </p:cNvSpPr>
+          <p:nvPr>
+            <p:ph type="title"/>
+          </p:nvPr>
+        </p:nvSpPr>
+        <p:spPr/>
+        <p:txBody>
+          <a:bodyPr/>
+          <a:lstStyle/>
+          <a:p>
+            <a:r>
+              <a:rPr lang="fi-FI" dirty="0"/>
+              <a:t>Malli</a:t>
+            </a:r>
+          </a:p>
+        </p:txBody>
+      </p:sp>
+      <p:sp>
+        <p:nvSpPr>
+          <p:cNvPr id="3" name="Sisällön paikkamerkki 2">
+            <a:extLst>
+              <a:ext uri="{FF2B5EF4-FFF2-40B4-BE49-F238E27FC236}">
+                <a16:creationId xmlns:a16="http://schemas.microsoft.com/office/drawing/2014/main" id="{AEB2745C-AEB7-F221-F9D5-91A7B9962E71}"/>
+              </a:ext>
+            </a:extLst>
+          </p:cNvPr>
+          <p:cNvSpPr>
+            <a:spLocks noGrp="1"/>
+          </p:cNvSpPr>
+          <p:nvPr>
+            <p:ph idx="1"/>
+          </p:nvPr>
+        </p:nvSpPr>
+        <p:spPr/>
+        <p:txBody>
+          <a:bodyPr/>
+          <a:lstStyle/>
+          <a:p>
+            <a:r>
+              <a:rPr lang="fi-FI" dirty="0"/>
+              <a:t>Mitä käytetään</a:t>
+            </a:r>
+          </a:p>
+          <a:p>
+            <a:pPr lvl="1"/>
+            <a:r>
+              <a:rPr lang="fi-FI" dirty="0"/>
+              <a:t>Miksi</a:t>
+            </a:r>
+          </a:p>
+          <a:p>
+            <a:r>
+              <a:rPr lang="fi-FI" dirty="0"/>
+              <a:t>Miten testattu</a:t>
+            </a:r>
+          </a:p>
+          <a:p>
+            <a:r>
+              <a:rPr lang="fi-FI" dirty="0"/>
+              <a:t>Miten toimii</a:t>
+            </a:r>
+          </a:p>
+        </p:txBody>
+      </p:sp>
+    </p:spTree>
+    <p:extLst>
+      <p:ext uri="{BB962C8B-B14F-4D97-AF65-F5344CB8AC3E}">
+        <p14:creationId xmlns:p14="http://schemas.microsoft.com/office/powerpoint/2010/main" val="602217079"/>
+      </p:ext>
+    </p:extLst>
+  </p:cSld>
+  <p:clrMapOvr>
+    <a:masterClrMapping/>
+  </p:clrMapOvr>
+</p:sld>
+</file>
+
+<file path=ppt/slides/slide4.xml><?xml version="1.0" encoding="utf-8"?>
+<p:sld xmlns:a="http://schemas.openxmlformats.org/drawingml/2006/main" xmlns:r="http://schemas.openxmlformats.org/officeDocument/2006/relationships" xmlns:p="http://schemas.openxmlformats.org/presentationml/2006/main">
+  <p:cSld>
+    <p:spTree>
+      <p:nvGrpSpPr>
+        <p:cNvPr id="1" name=""/>
+        <p:cNvGrpSpPr/>
+        <p:nvPr/>
+      </p:nvGrpSpPr>
+      <p:grpSpPr>
+        <a:xfrm>
+          <a:off x="0" y="0"/>
+          <a:ext cx="0" cy="0"/>
+          <a:chOff x="0" y="0"/>
+          <a:chExt cx="0" cy="0"/>
+        </a:xfrm>
+      </p:grpSpPr>
+      <p:sp>
+        <p:nvSpPr>
+          <p:cNvPr id="2" name="Otsikko 1">
+            <a:extLst>
+              <a:ext uri="{FF2B5EF4-FFF2-40B4-BE49-F238E27FC236}">
+                <a16:creationId xmlns:a16="http://schemas.microsoft.com/office/drawing/2014/main" id="{486877ED-D104-784E-15B5-C0D7A29889CC}"/>
+              </a:ext>
+            </a:extLst>
+          </p:cNvPr>
+          <p:cNvSpPr>
+            <a:spLocks noGrp="1"/>
+          </p:cNvSpPr>
+          <p:nvPr>
+            <p:ph type="title"/>
+          </p:nvPr>
+        </p:nvSpPr>
+        <p:spPr/>
+        <p:txBody>
+          <a:bodyPr/>
+          <a:lstStyle/>
+          <a:p>
+            <a:r>
+              <a:rPr lang="fi-FI" dirty="0"/>
+              <a:t>Tulokset	</a:t>
+            </a:r>
+          </a:p>
+        </p:txBody>
+      </p:sp>
+      <p:sp>
+        <p:nvSpPr>
+          <p:cNvPr id="3" name="Sisällön paikkamerkki 2">
+            <a:extLst>
+              <a:ext uri="{FF2B5EF4-FFF2-40B4-BE49-F238E27FC236}">
+                <a16:creationId xmlns:a16="http://schemas.microsoft.com/office/drawing/2014/main" id="{746C4FFC-18AE-5A10-A08F-2BFC15ABCC3C}"/>
+              </a:ext>
+            </a:extLst>
+          </p:cNvPr>
+          <p:cNvSpPr>
+            <a:spLocks noGrp="1"/>
+          </p:cNvSpPr>
+          <p:nvPr>
+            <p:ph idx="1"/>
+          </p:nvPr>
+        </p:nvSpPr>
+        <p:spPr/>
+        <p:txBody>
+          <a:bodyPr/>
+          <a:lstStyle/>
+          <a:p>
+            <a:r>
+              <a:rPr lang="fi-FI" dirty="0"/>
+              <a:t>Mitkä jutut tärkeimpiä</a:t>
+            </a:r>
+          </a:p>
+          <a:p>
+            <a:r>
+              <a:rPr lang="fi-FI" dirty="0"/>
+              <a:t>Ongelmia?</a:t>
+            </a:r>
+          </a:p>
+          <a:p>
+            <a:r>
+              <a:rPr lang="fi-FI" dirty="0"/>
+              <a:t>Kuvia</a:t>
+            </a:r>
+          </a:p>
+        </p:txBody>
+      </p:sp>
+    </p:spTree>
+    <p:extLst>
+      <p:ext uri="{BB962C8B-B14F-4D97-AF65-F5344CB8AC3E}">
+        <p14:creationId xmlns:p14="http://schemas.microsoft.com/office/powerpoint/2010/main" val="2077846966"/>
       </p:ext>
     </p:extLst>
   </p:cSld>

--- a/esitys.pptx
+++ b/esitys.pptx
@@ -5,10 +5,13 @@
     <p:sldMasterId id="2147483648" r:id="rId1"/>
   </p:sldMasterIdLst>
   <p:sldIdLst>
-    <p:sldId id="256" r:id="rId2"/>
-    <p:sldId id="257" r:id="rId3"/>
-    <p:sldId id="258" r:id="rId4"/>
-    <p:sldId id="259" r:id="rId5"/>
+    <p:sldId id="262" r:id="rId2"/>
+    <p:sldId id="256" r:id="rId3"/>
+    <p:sldId id="257" r:id="rId4"/>
+    <p:sldId id="260" r:id="rId5"/>
+    <p:sldId id="258" r:id="rId6"/>
+    <p:sldId id="259" r:id="rId7"/>
+    <p:sldId id="261" r:id="rId8"/>
   </p:sldIdLst>
   <p:sldSz cx="12192000" cy="6858000"/>
   <p:notesSz cx="6858000" cy="9144000"/>
@@ -262,7 +265,7 @@
           <a:p>
             <a:fld id="{316DE2E7-DD13-434B-8736-E41092908FAF}" type="datetimeFigureOut">
               <a:rPr lang="fi-FI" smtClean="0"/>
-              <a:t>19.11.2025</a:t>
+              <a:t>25.11.2025</a:t>
             </a:fld>
             <a:endParaRPr lang="fi-FI"/>
           </a:p>
@@ -460,7 +463,7 @@
           <a:p>
             <a:fld id="{316DE2E7-DD13-434B-8736-E41092908FAF}" type="datetimeFigureOut">
               <a:rPr lang="fi-FI" smtClean="0"/>
-              <a:t>19.11.2025</a:t>
+              <a:t>25.11.2025</a:t>
             </a:fld>
             <a:endParaRPr lang="fi-FI"/>
           </a:p>
@@ -668,7 +671,7 @@
           <a:p>
             <a:fld id="{316DE2E7-DD13-434B-8736-E41092908FAF}" type="datetimeFigureOut">
               <a:rPr lang="fi-FI" smtClean="0"/>
-              <a:t>19.11.2025</a:t>
+              <a:t>25.11.2025</a:t>
             </a:fld>
             <a:endParaRPr lang="fi-FI"/>
           </a:p>
@@ -866,7 +869,7 @@
           <a:p>
             <a:fld id="{316DE2E7-DD13-434B-8736-E41092908FAF}" type="datetimeFigureOut">
               <a:rPr lang="fi-FI" smtClean="0"/>
-              <a:t>19.11.2025</a:t>
+              <a:t>25.11.2025</a:t>
             </a:fld>
             <a:endParaRPr lang="fi-FI"/>
           </a:p>
@@ -1141,7 +1144,7 @@
           <a:p>
             <a:fld id="{316DE2E7-DD13-434B-8736-E41092908FAF}" type="datetimeFigureOut">
               <a:rPr lang="fi-FI" smtClean="0"/>
-              <a:t>19.11.2025</a:t>
+              <a:t>25.11.2025</a:t>
             </a:fld>
             <a:endParaRPr lang="fi-FI"/>
           </a:p>
@@ -1406,7 +1409,7 @@
           <a:p>
             <a:fld id="{316DE2E7-DD13-434B-8736-E41092908FAF}" type="datetimeFigureOut">
               <a:rPr lang="fi-FI" smtClean="0"/>
-              <a:t>19.11.2025</a:t>
+              <a:t>25.11.2025</a:t>
             </a:fld>
             <a:endParaRPr lang="fi-FI"/>
           </a:p>
@@ -1818,7 +1821,7 @@
           <a:p>
             <a:fld id="{316DE2E7-DD13-434B-8736-E41092908FAF}" type="datetimeFigureOut">
               <a:rPr lang="fi-FI" smtClean="0"/>
-              <a:t>19.11.2025</a:t>
+              <a:t>25.11.2025</a:t>
             </a:fld>
             <a:endParaRPr lang="fi-FI"/>
           </a:p>
@@ -1959,7 +1962,7 @@
           <a:p>
             <a:fld id="{316DE2E7-DD13-434B-8736-E41092908FAF}" type="datetimeFigureOut">
               <a:rPr lang="fi-FI" smtClean="0"/>
-              <a:t>19.11.2025</a:t>
+              <a:t>25.11.2025</a:t>
             </a:fld>
             <a:endParaRPr lang="fi-FI"/>
           </a:p>
@@ -2072,7 +2075,7 @@
           <a:p>
             <a:fld id="{316DE2E7-DD13-434B-8736-E41092908FAF}" type="datetimeFigureOut">
               <a:rPr lang="fi-FI" smtClean="0"/>
-              <a:t>19.11.2025</a:t>
+              <a:t>25.11.2025</a:t>
             </a:fld>
             <a:endParaRPr lang="fi-FI"/>
           </a:p>
@@ -2383,7 +2386,7 @@
           <a:p>
             <a:fld id="{316DE2E7-DD13-434B-8736-E41092908FAF}" type="datetimeFigureOut">
               <a:rPr lang="fi-FI" smtClean="0"/>
-              <a:t>19.11.2025</a:t>
+              <a:t>25.11.2025</a:t>
             </a:fld>
             <a:endParaRPr lang="fi-FI"/>
           </a:p>
@@ -2671,7 +2674,7 @@
           <a:p>
             <a:fld id="{316DE2E7-DD13-434B-8736-E41092908FAF}" type="datetimeFigureOut">
               <a:rPr lang="fi-FI" smtClean="0"/>
-              <a:t>19.11.2025</a:t>
+              <a:t>25.11.2025</a:t>
             </a:fld>
             <a:endParaRPr lang="fi-FI"/>
           </a:p>
@@ -2912,7 +2915,7 @@
           <a:p>
             <a:fld id="{316DE2E7-DD13-434B-8736-E41092908FAF}" type="datetimeFigureOut">
               <a:rPr lang="fi-FI" smtClean="0"/>
-              <a:t>19.11.2025</a:t>
+              <a:t>25.11.2025</a:t>
             </a:fld>
             <a:endParaRPr lang="fi-FI"/>
           </a:p>
@@ -3334,7 +3337,7 @@
           <p:cNvPr id="2" name="Otsikko 1">
             <a:extLst>
               <a:ext uri="{FF2B5EF4-FFF2-40B4-BE49-F238E27FC236}">
-                <a16:creationId xmlns:a16="http://schemas.microsoft.com/office/drawing/2014/main" id="{A352BD35-CEFB-63BB-997D-4CD9A76DE579}"/>
+                <a16:creationId xmlns:a16="http://schemas.microsoft.com/office/drawing/2014/main" id="{D132C709-394B-830B-4607-8346A721F2EB}"/>
               </a:ext>
             </a:extLst>
           </p:cNvPr>
@@ -3352,7 +3355,7 @@
           <a:p>
             <a:r>
               <a:rPr lang="fi-FI" dirty="0"/>
-              <a:t>Tavoite</a:t>
+              <a:t>Oppilaiden koetulosten ennustaminen</a:t>
             </a:r>
           </a:p>
         </p:txBody>
@@ -3362,7 +3365,7 @@
           <p:cNvPr id="3" name="Alaotsikko 2">
             <a:extLst>
               <a:ext uri="{FF2B5EF4-FFF2-40B4-BE49-F238E27FC236}">
-                <a16:creationId xmlns:a16="http://schemas.microsoft.com/office/drawing/2014/main" id="{9D934FDA-D8C4-A19C-BA3F-032A03495EB2}"/>
+                <a16:creationId xmlns:a16="http://schemas.microsoft.com/office/drawing/2014/main" id="{54F100DC-F82F-7D0A-49C5-51838601D29B}"/>
               </a:ext>
             </a:extLst>
           </p:cNvPr>
@@ -3380,15 +3383,19 @@
           <a:p>
             <a:r>
               <a:rPr lang="fi-FI" dirty="0"/>
-              <a:t>Ennustaa koetuloksia ja tunnistaa millä </a:t>
-            </a:r>
-            <a:r>
-              <a:rPr lang="fi-FI" dirty="0" err="1"/>
-              <a:t>tekijöilllä</a:t>
-            </a:r>
+              <a:t>Joona Launonen, Anni Tarvainen, Santeri Leinonen</a:t>
+            </a:r>
+          </a:p>
+          <a:p>
             <a:r>
               <a:rPr lang="fi-FI" dirty="0"/>
-              <a:t> on suurin vaikutus.</a:t>
+              <a:t>Syksy 2025</a:t>
+            </a:r>
+          </a:p>
+          <a:p>
+            <a:r>
+              <a:rPr lang="fi-FI" dirty="0"/>
+              <a:t>TIES4600</a:t>
             </a:r>
           </a:p>
         </p:txBody>
@@ -3396,7 +3403,7 @@
     </p:spTree>
     <p:extLst>
       <p:ext uri="{BB962C8B-B14F-4D97-AF65-F5344CB8AC3E}">
-        <p14:creationId xmlns:p14="http://schemas.microsoft.com/office/powerpoint/2010/main" val="1582695251"/>
+        <p14:creationId xmlns:p14="http://schemas.microsoft.com/office/powerpoint/2010/main" val="2232589347"/>
       </p:ext>
     </p:extLst>
   </p:cSld>
@@ -3428,15 +3435,15 @@
           <p:cNvPr id="2" name="Otsikko 1">
             <a:extLst>
               <a:ext uri="{FF2B5EF4-FFF2-40B4-BE49-F238E27FC236}">
-                <a16:creationId xmlns:a16="http://schemas.microsoft.com/office/drawing/2014/main" id="{700E4F13-0FB6-C659-5A45-D84B090B51F8}"/>
-              </a:ext>
-            </a:extLst>
-          </p:cNvPr>
-          <p:cNvSpPr>
-            <a:spLocks noGrp="1"/>
-          </p:cNvSpPr>
-          <p:nvPr>
-            <p:ph type="title"/>
+                <a16:creationId xmlns:a16="http://schemas.microsoft.com/office/drawing/2014/main" id="{A352BD35-CEFB-63BB-997D-4CD9A76DE579}"/>
+              </a:ext>
+            </a:extLst>
+          </p:cNvPr>
+          <p:cNvSpPr>
+            <a:spLocks noGrp="1"/>
+          </p:cNvSpPr>
+          <p:nvPr>
+            <p:ph type="ctrTitle"/>
           </p:nvPr>
         </p:nvSpPr>
         <p:spPr/>
@@ -3446,25 +3453,25 @@
           <a:p>
             <a:r>
               <a:rPr lang="fi-FI" dirty="0"/>
-              <a:t>Datan esittely</a:t>
-            </a:r>
-          </a:p>
-        </p:txBody>
-      </p:sp>
-      <p:sp>
-        <p:nvSpPr>
-          <p:cNvPr id="3" name="Sisällön paikkamerkki 2">
-            <a:extLst>
-              <a:ext uri="{FF2B5EF4-FFF2-40B4-BE49-F238E27FC236}">
-                <a16:creationId xmlns:a16="http://schemas.microsoft.com/office/drawing/2014/main" id="{C04673C7-F578-2ECA-98EF-6133E9A7BE3A}"/>
-              </a:ext>
-            </a:extLst>
-          </p:cNvPr>
-          <p:cNvSpPr>
-            <a:spLocks noGrp="1"/>
-          </p:cNvSpPr>
-          <p:nvPr>
-            <p:ph idx="1"/>
+              <a:t>Tavoite</a:t>
+            </a:r>
+          </a:p>
+        </p:txBody>
+      </p:sp>
+      <p:sp>
+        <p:nvSpPr>
+          <p:cNvPr id="3" name="Alaotsikko 2">
+            <a:extLst>
+              <a:ext uri="{FF2B5EF4-FFF2-40B4-BE49-F238E27FC236}">
+                <a16:creationId xmlns:a16="http://schemas.microsoft.com/office/drawing/2014/main" id="{9D934FDA-D8C4-A19C-BA3F-032A03495EB2}"/>
+              </a:ext>
+            </a:extLst>
+          </p:cNvPr>
+          <p:cNvSpPr>
+            <a:spLocks noGrp="1"/>
+          </p:cNvSpPr>
+          <p:nvPr>
+            <p:ph type="subTitle" idx="1"/>
           </p:nvPr>
         </p:nvSpPr>
         <p:spPr/>
@@ -3474,30 +3481,15 @@
           <a:p>
             <a:r>
               <a:rPr lang="fi-FI" dirty="0"/>
-              <a:t>Muuttujien kuvailu</a:t>
-            </a:r>
-          </a:p>
-          <a:p>
-            <a:r>
-              <a:rPr lang="fi-FI" dirty="0"/>
-              <a:t>Puuttuvat arvot</a:t>
-            </a:r>
-          </a:p>
-          <a:p>
-            <a:r>
-              <a:rPr lang="fi-FI" dirty="0"/>
-              <a:t>Kuvia</a:t>
-            </a:r>
-          </a:p>
-          <a:p>
-            <a:endParaRPr lang="fi-FI" dirty="0"/>
+              <a:t>Ennustaa koetuloksia ja tunnistaa millä tekijöillä on suurin vaikutus.</a:t>
+            </a:r>
           </a:p>
         </p:txBody>
       </p:sp>
     </p:spTree>
     <p:extLst>
       <p:ext uri="{BB962C8B-B14F-4D97-AF65-F5344CB8AC3E}">
-        <p14:creationId xmlns:p14="http://schemas.microsoft.com/office/powerpoint/2010/main" val="1263036950"/>
+        <p14:creationId xmlns:p14="http://schemas.microsoft.com/office/powerpoint/2010/main" val="1582695251"/>
       </p:ext>
     </p:extLst>
   </p:cSld>
@@ -3529,7 +3521,7 @@
           <p:cNvPr id="2" name="Otsikko 1">
             <a:extLst>
               <a:ext uri="{FF2B5EF4-FFF2-40B4-BE49-F238E27FC236}">
-                <a16:creationId xmlns:a16="http://schemas.microsoft.com/office/drawing/2014/main" id="{E9AE275C-BA1D-A8BA-D769-A7828155F95E}"/>
+                <a16:creationId xmlns:a16="http://schemas.microsoft.com/office/drawing/2014/main" id="{700E4F13-0FB6-C659-5A45-D84B090B51F8}"/>
               </a:ext>
             </a:extLst>
           </p:cNvPr>
@@ -3547,7 +3539,7 @@
           <a:p>
             <a:r>
               <a:rPr lang="fi-FI" dirty="0"/>
-              <a:t>Malli</a:t>
+              <a:t>Datan esittely</a:t>
             </a:r>
           </a:p>
         </p:txBody>
@@ -3557,7 +3549,7 @@
           <p:cNvPr id="3" name="Sisällön paikkamerkki 2">
             <a:extLst>
               <a:ext uri="{FF2B5EF4-FFF2-40B4-BE49-F238E27FC236}">
-                <a16:creationId xmlns:a16="http://schemas.microsoft.com/office/drawing/2014/main" id="{AEB2745C-AEB7-F221-F9D5-91A7B9962E71}"/>
+                <a16:creationId xmlns:a16="http://schemas.microsoft.com/office/drawing/2014/main" id="{C04673C7-F578-2ECA-98EF-6133E9A7BE3A}"/>
               </a:ext>
             </a:extLst>
           </p:cNvPr>
@@ -3570,39 +3562,88 @@
         </p:nvSpPr>
         <p:spPr/>
         <p:txBody>
-          <a:bodyPr/>
+          <a:bodyPr>
+            <a:normAutofit lnSpcReduction="10000"/>
+          </a:bodyPr>
           <a:lstStyle/>
           <a:p>
             <a:r>
               <a:rPr lang="fi-FI" dirty="0"/>
-              <a:t>Mitä käytetään</a:t>
-            </a:r>
-          </a:p>
-          <a:p>
-            <a:pPr lvl="1"/>
+              <a:t>Simuloitua dataa</a:t>
+            </a:r>
+          </a:p>
+          <a:p>
             <a:r>
               <a:rPr lang="fi-FI" dirty="0"/>
-              <a:t>Miksi</a:t>
+              <a:t>6607 havaintoa, 20 muuttujasta</a:t>
             </a:r>
           </a:p>
           <a:p>
             <a:r>
               <a:rPr lang="fi-FI" dirty="0"/>
-              <a:t>Miten testattu</a:t>
-            </a:r>
-          </a:p>
-          <a:p>
+              <a:t>Tutkitaan muuttujien vaikutusta </a:t>
+            </a:r>
+            <a:r>
+              <a:rPr lang="fi-FI" dirty="0" err="1"/>
+              <a:t>Exam_Score</a:t>
+            </a:r>
             <a:r>
               <a:rPr lang="fi-FI" dirty="0"/>
-              <a:t>Miten toimii</a:t>
-            </a:r>
+              <a:t>-muuttujaan</a:t>
+            </a:r>
+          </a:p>
+          <a:p>
+            <a:r>
+              <a:rPr lang="fi-FI" dirty="0" err="1"/>
+              <a:t>Exam_Score</a:t>
+            </a:r>
+            <a:r>
+              <a:rPr lang="fi-FI" dirty="0"/>
+              <a:t> vaihtelee 55:n ja 101:n välillä</a:t>
+            </a:r>
+          </a:p>
+          <a:p>
+            <a:endParaRPr lang="fi-FI" dirty="0"/>
+          </a:p>
+          <a:p>
+            <a:r>
+              <a:rPr lang="fi-FI" dirty="0" err="1"/>
+              <a:t>Parental_Education_Level</a:t>
+            </a:r>
+            <a:r>
+              <a:rPr lang="fi-FI" dirty="0"/>
+              <a:t>-muuttujassa on 90 puuttuvaa havaintoa</a:t>
+            </a:r>
+          </a:p>
+          <a:p>
+            <a:r>
+              <a:rPr lang="fi-FI" dirty="0" err="1"/>
+              <a:t>Teacher_Quality</a:t>
+            </a:r>
+            <a:r>
+              <a:rPr lang="fi-FI" dirty="0"/>
+              <a:t>-muuttujassa on 78 puuttuvaa havaintoa</a:t>
+            </a:r>
+          </a:p>
+          <a:p>
+            <a:r>
+              <a:rPr lang="fi-FI" dirty="0" err="1"/>
+              <a:t>Distance_From_Home</a:t>
+            </a:r>
+            <a:r>
+              <a:rPr lang="fi-FI" dirty="0"/>
+              <a:t>-muuttujassa on 67 puuttuvaa havaintoa</a:t>
+            </a:r>
+          </a:p>
+          <a:p>
+            <a:endParaRPr lang="fi-FI" dirty="0"/>
           </a:p>
         </p:txBody>
       </p:sp>
     </p:spTree>
     <p:extLst>
       <p:ext uri="{BB962C8B-B14F-4D97-AF65-F5344CB8AC3E}">
-        <p14:creationId xmlns:p14="http://schemas.microsoft.com/office/powerpoint/2010/main" val="602217079"/>
+        <p14:creationId xmlns:p14="http://schemas.microsoft.com/office/powerpoint/2010/main" val="1263036950"/>
       </p:ext>
     </p:extLst>
   </p:cSld>
@@ -3634,6 +3675,249 @@
           <p:cNvPr id="2" name="Otsikko 1">
             <a:extLst>
               <a:ext uri="{FF2B5EF4-FFF2-40B4-BE49-F238E27FC236}">
+                <a16:creationId xmlns:a16="http://schemas.microsoft.com/office/drawing/2014/main" id="{F7B2F17B-FA2B-8B8A-C2E9-14E5D7A9B02F}"/>
+              </a:ext>
+            </a:extLst>
+          </p:cNvPr>
+          <p:cNvSpPr>
+            <a:spLocks noGrp="1"/>
+          </p:cNvSpPr>
+          <p:nvPr>
+            <p:ph type="title"/>
+          </p:nvPr>
+        </p:nvSpPr>
+        <p:spPr/>
+        <p:txBody>
+          <a:bodyPr/>
+          <a:lstStyle/>
+          <a:p>
+            <a:r>
+              <a:rPr lang="fi-FI" dirty="0"/>
+              <a:t>Datan käsittely</a:t>
+            </a:r>
+          </a:p>
+        </p:txBody>
+      </p:sp>
+      <p:sp>
+        <p:nvSpPr>
+          <p:cNvPr id="3" name="Sisällön paikkamerkki 2">
+            <a:extLst>
+              <a:ext uri="{FF2B5EF4-FFF2-40B4-BE49-F238E27FC236}">
+                <a16:creationId xmlns:a16="http://schemas.microsoft.com/office/drawing/2014/main" id="{C261BFE2-F3AB-BCF0-8B84-505F2BFF9548}"/>
+              </a:ext>
+            </a:extLst>
+          </p:cNvPr>
+          <p:cNvSpPr>
+            <a:spLocks noGrp="1"/>
+          </p:cNvSpPr>
+          <p:nvPr>
+            <p:ph idx="1"/>
+          </p:nvPr>
+        </p:nvSpPr>
+        <p:spPr/>
+        <p:txBody>
+          <a:bodyPr/>
+          <a:lstStyle/>
+          <a:p>
+            <a:r>
+              <a:rPr lang="fi-FI" dirty="0"/>
+              <a:t>Koska puuttuvia havaintoja oli vähän suhteessa datan kokonaismäärään, voitiin puuttuvat havainnot poistaa datasta.</a:t>
+            </a:r>
+          </a:p>
+          <a:p>
+            <a:r>
+              <a:rPr lang="fi-FI" dirty="0"/>
+              <a:t>Jäljelle jäi 6378 havaintoa.</a:t>
+            </a:r>
+          </a:p>
+          <a:p>
+            <a:endParaRPr lang="fi-FI" dirty="0"/>
+          </a:p>
+          <a:p>
+            <a:r>
+              <a:rPr lang="fi-FI" dirty="0"/>
+              <a:t>Datalle tehtiin logaritmimuunnos, jotta satunnaiset ääriarvot eivät vaikuta malliin niin radikaalisti.</a:t>
+            </a:r>
+          </a:p>
+          <a:p>
+            <a:endParaRPr lang="fi-FI" dirty="0"/>
+          </a:p>
+          <a:p>
+            <a:r>
+              <a:rPr lang="fi-FI"/>
+              <a:t>Korrelaatiot?</a:t>
+            </a:r>
+            <a:endParaRPr lang="fi-FI" dirty="0"/>
+          </a:p>
+        </p:txBody>
+      </p:sp>
+    </p:spTree>
+    <p:extLst>
+      <p:ext uri="{BB962C8B-B14F-4D97-AF65-F5344CB8AC3E}">
+        <p14:creationId xmlns:p14="http://schemas.microsoft.com/office/powerpoint/2010/main" val="3345651223"/>
+      </p:ext>
+    </p:extLst>
+  </p:cSld>
+  <p:clrMapOvr>
+    <a:masterClrMapping/>
+  </p:clrMapOvr>
+</p:sld>
+</file>
+
+<file path=ppt/slides/slide5.xml><?xml version="1.0" encoding="utf-8"?>
+<p:sld xmlns:a="http://schemas.openxmlformats.org/drawingml/2006/main" xmlns:r="http://schemas.openxmlformats.org/officeDocument/2006/relationships" xmlns:p="http://schemas.openxmlformats.org/presentationml/2006/main">
+  <p:cSld>
+    <p:spTree>
+      <p:nvGrpSpPr>
+        <p:cNvPr id="1" name=""/>
+        <p:cNvGrpSpPr/>
+        <p:nvPr/>
+      </p:nvGrpSpPr>
+      <p:grpSpPr>
+        <a:xfrm>
+          <a:off x="0" y="0"/>
+          <a:ext cx="0" cy="0"/>
+          <a:chOff x="0" y="0"/>
+          <a:chExt cx="0" cy="0"/>
+        </a:xfrm>
+      </p:grpSpPr>
+      <p:sp>
+        <p:nvSpPr>
+          <p:cNvPr id="2" name="Otsikko 1">
+            <a:extLst>
+              <a:ext uri="{FF2B5EF4-FFF2-40B4-BE49-F238E27FC236}">
+                <a16:creationId xmlns:a16="http://schemas.microsoft.com/office/drawing/2014/main" id="{E9AE275C-BA1D-A8BA-D769-A7828155F95E}"/>
+              </a:ext>
+            </a:extLst>
+          </p:cNvPr>
+          <p:cNvSpPr>
+            <a:spLocks noGrp="1"/>
+          </p:cNvSpPr>
+          <p:nvPr>
+            <p:ph type="title"/>
+          </p:nvPr>
+        </p:nvSpPr>
+        <p:spPr/>
+        <p:txBody>
+          <a:bodyPr/>
+          <a:lstStyle/>
+          <a:p>
+            <a:r>
+              <a:rPr lang="fi-FI" dirty="0"/>
+              <a:t>Malli</a:t>
+            </a:r>
+          </a:p>
+        </p:txBody>
+      </p:sp>
+      <p:sp>
+        <p:nvSpPr>
+          <p:cNvPr id="3" name="Sisällön paikkamerkki 2">
+            <a:extLst>
+              <a:ext uri="{FF2B5EF4-FFF2-40B4-BE49-F238E27FC236}">
+                <a16:creationId xmlns:a16="http://schemas.microsoft.com/office/drawing/2014/main" id="{AEB2745C-AEB7-F221-F9D5-91A7B9962E71}"/>
+              </a:ext>
+            </a:extLst>
+          </p:cNvPr>
+          <p:cNvSpPr>
+            <a:spLocks noGrp="1"/>
+          </p:cNvSpPr>
+          <p:nvPr>
+            <p:ph idx="1"/>
+          </p:nvPr>
+        </p:nvSpPr>
+        <p:spPr/>
+        <p:txBody>
+          <a:bodyPr>
+            <a:normAutofit lnSpcReduction="10000"/>
+          </a:bodyPr>
+          <a:lstStyle/>
+          <a:p>
+            <a:r>
+              <a:rPr lang="fi-FI" dirty="0"/>
+              <a:t>Mitä käytetään</a:t>
+            </a:r>
+          </a:p>
+          <a:p>
+            <a:pPr lvl="1"/>
+            <a:r>
+              <a:rPr lang="fi-FI" dirty="0"/>
+              <a:t>Miksi</a:t>
+            </a:r>
+          </a:p>
+          <a:p>
+            <a:pPr lvl="1"/>
+            <a:r>
+              <a:rPr lang="fi-FI" dirty="0"/>
+              <a:t>Vertailu</a:t>
+            </a:r>
+          </a:p>
+          <a:p>
+            <a:r>
+              <a:rPr lang="fi-FI" dirty="0"/>
+              <a:t>Miten testattu</a:t>
+            </a:r>
+          </a:p>
+          <a:p>
+            <a:r>
+              <a:rPr lang="fi-FI" dirty="0"/>
+              <a:t>Miten toimii</a:t>
+            </a:r>
+          </a:p>
+          <a:p>
+            <a:pPr marL="0" indent="0">
+              <a:buNone/>
+            </a:pPr>
+            <a:endParaRPr lang="fi-FI" dirty="0"/>
+          </a:p>
+          <a:p>
+            <a:r>
+              <a:rPr lang="fi-FI" dirty="0"/>
+              <a:t>Numeeristen muuttujien ja vastemuuttujien suhde vaikuttaa tarkastellessa lineaariselta.</a:t>
+            </a:r>
+          </a:p>
+          <a:p>
+            <a:r>
+              <a:rPr lang="fi-FI" dirty="0"/>
+              <a:t>Lineaarinen malli on hyvä tutkittaessa miten muuttujat vaikuttavat vastemuuttujaan.</a:t>
+            </a:r>
+          </a:p>
+        </p:txBody>
+      </p:sp>
+    </p:spTree>
+    <p:extLst>
+      <p:ext uri="{BB962C8B-B14F-4D97-AF65-F5344CB8AC3E}">
+        <p14:creationId xmlns:p14="http://schemas.microsoft.com/office/powerpoint/2010/main" val="602217079"/>
+      </p:ext>
+    </p:extLst>
+  </p:cSld>
+  <p:clrMapOvr>
+    <a:masterClrMapping/>
+  </p:clrMapOvr>
+</p:sld>
+</file>
+
+<file path=ppt/slides/slide6.xml><?xml version="1.0" encoding="utf-8"?>
+<p:sld xmlns:a="http://schemas.openxmlformats.org/drawingml/2006/main" xmlns:r="http://schemas.openxmlformats.org/officeDocument/2006/relationships" xmlns:p="http://schemas.openxmlformats.org/presentationml/2006/main">
+  <p:cSld>
+    <p:spTree>
+      <p:nvGrpSpPr>
+        <p:cNvPr id="1" name=""/>
+        <p:cNvGrpSpPr/>
+        <p:nvPr/>
+      </p:nvGrpSpPr>
+      <p:grpSpPr>
+        <a:xfrm>
+          <a:off x="0" y="0"/>
+          <a:ext cx="0" cy="0"/>
+          <a:chOff x="0" y="0"/>
+          <a:chExt cx="0" cy="0"/>
+        </a:xfrm>
+      </p:grpSpPr>
+      <p:sp>
+        <p:nvSpPr>
+          <p:cNvPr id="2" name="Otsikko 1">
+            <a:extLst>
+              <a:ext uri="{FF2B5EF4-FFF2-40B4-BE49-F238E27FC236}">
                 <a16:creationId xmlns:a16="http://schemas.microsoft.com/office/drawing/2014/main" id="{486877ED-D104-784E-15B5-C0D7A29889CC}"/>
               </a:ext>
             </a:extLst>
@@ -3701,6 +3985,89 @@
     <p:extLst>
       <p:ext uri="{BB962C8B-B14F-4D97-AF65-F5344CB8AC3E}">
         <p14:creationId xmlns:p14="http://schemas.microsoft.com/office/powerpoint/2010/main" val="2077846966"/>
+      </p:ext>
+    </p:extLst>
+  </p:cSld>
+  <p:clrMapOvr>
+    <a:masterClrMapping/>
+  </p:clrMapOvr>
+</p:sld>
+</file>
+
+<file path=ppt/slides/slide7.xml><?xml version="1.0" encoding="utf-8"?>
+<p:sld xmlns:a="http://schemas.openxmlformats.org/drawingml/2006/main" xmlns:r="http://schemas.openxmlformats.org/officeDocument/2006/relationships" xmlns:p="http://schemas.openxmlformats.org/presentationml/2006/main">
+  <p:cSld>
+    <p:spTree>
+      <p:nvGrpSpPr>
+        <p:cNvPr id="1" name=""/>
+        <p:cNvGrpSpPr/>
+        <p:nvPr/>
+      </p:nvGrpSpPr>
+      <p:grpSpPr>
+        <a:xfrm>
+          <a:off x="0" y="0"/>
+          <a:ext cx="0" cy="0"/>
+          <a:chOff x="0" y="0"/>
+          <a:chExt cx="0" cy="0"/>
+        </a:xfrm>
+      </p:grpSpPr>
+      <p:sp>
+        <p:nvSpPr>
+          <p:cNvPr id="2" name="Otsikko 1">
+            <a:extLst>
+              <a:ext uri="{FF2B5EF4-FFF2-40B4-BE49-F238E27FC236}">
+                <a16:creationId xmlns:a16="http://schemas.microsoft.com/office/drawing/2014/main" id="{2731B409-D073-ACD9-53BB-302DAAD19E14}"/>
+              </a:ext>
+            </a:extLst>
+          </p:cNvPr>
+          <p:cNvSpPr>
+            <a:spLocks noGrp="1"/>
+          </p:cNvSpPr>
+          <p:nvPr>
+            <p:ph type="title"/>
+          </p:nvPr>
+        </p:nvSpPr>
+        <p:spPr/>
+        <p:txBody>
+          <a:bodyPr/>
+          <a:lstStyle/>
+          <a:p>
+            <a:r>
+              <a:rPr lang="fi-FI" dirty="0"/>
+              <a:t>Kuvat</a:t>
+            </a:r>
+          </a:p>
+        </p:txBody>
+      </p:sp>
+      <p:sp>
+        <p:nvSpPr>
+          <p:cNvPr id="3" name="Sisällön paikkamerkki 2">
+            <a:extLst>
+              <a:ext uri="{FF2B5EF4-FFF2-40B4-BE49-F238E27FC236}">
+                <a16:creationId xmlns:a16="http://schemas.microsoft.com/office/drawing/2014/main" id="{848913DC-157C-87DE-ADF4-72DF71D13AE9}"/>
+              </a:ext>
+            </a:extLst>
+          </p:cNvPr>
+          <p:cNvSpPr>
+            <a:spLocks noGrp="1"/>
+          </p:cNvSpPr>
+          <p:nvPr>
+            <p:ph idx="1"/>
+          </p:nvPr>
+        </p:nvSpPr>
+        <p:spPr/>
+        <p:txBody>
+          <a:bodyPr/>
+          <a:lstStyle/>
+          <a:p>
+            <a:endParaRPr lang="fi-FI"/>
+          </a:p>
+        </p:txBody>
+      </p:sp>
+    </p:spTree>
+    <p:extLst>
+      <p:ext uri="{BB962C8B-B14F-4D97-AF65-F5344CB8AC3E}">
+        <p14:creationId xmlns:p14="http://schemas.microsoft.com/office/powerpoint/2010/main" val="3561962617"/>
       </p:ext>
     </p:extLst>
   </p:cSld>
